--- a/decks/hist-dictatorship/hist-dictatorship_ch2_hitler-rise.pptx
+++ b/decks/hist-dictatorship/hist-dictatorship_ch2_hitler-rise.pptx
@@ -126,30 +126,30 @@
   <p:extLst>
     <p:ext uri="{521415D9-36F7-43E2-AB2F-B90AF26B5E84}">
       <p14:sectionLst xmlns:p14="http://schemas.microsoft.com/office/powerpoint/2010/main">
-        <p14:section name="Opening" id="{7e3e7b9f-3f2a-cfea-e873-c5d2a6739e3e}">
+        <p14:section name="Opening" id="{9ab8994b-95e4-bb5a-a00e-4ce388b33469}">
           <p14:sldIdLst>
             <p14:sldId id="256"/>
           </p14:sldIdLst>
         </p14:section>
-        <p14:section name="Gate" id="{487039ad-ea18-dbb1-68d3-354b6a32f82b}">
+        <p14:section name="Gate" id="{e21b16a2-9d1d-3868-8ab8-a86092f5fa3f}">
           <p14:sldIdLst>
             <p14:sldId id="257"/>
             <p14:sldId id="258"/>
           </p14:sldIdLst>
         </p14:section>
-        <p14:section name="Pre-teach" id="{3d057ba1-516b-fae0-ba24-c7ea4e0b159c}">
+        <p14:section name="Pre-teach" id="{25aa61bb-afeb-2c11-17e0-7f6202f3218e}">
           <p14:sldIdLst>
             <p14:sldId id="259"/>
             <p14:sldId id="260"/>
           </p14:sldIdLst>
         </p14:section>
-        <p14:section name="Read-along" id="{5f175d00-3792-a53e-6b8d-c959cdd6a36e}">
+        <p14:section name="Read-along" id="{faa6b535-092f-1fbe-a631-554ef7e75010}">
           <p14:sldIdLst>
             <p14:sldId id="261"/>
             <p14:sldId id="262"/>
           </p14:sldIdLst>
         </p14:section>
-        <p14:section name="Teach" id="{5981ec7f-c897-cc85-20d2-4982028ae82d}">
+        <p14:section name="Teach" id="{5cfd3dfd-e460-29f9-5aea-974810c9366a}">
           <p14:sldIdLst>
             <p14:sldId id="263"/>
             <p14:sldId id="264"/>
@@ -158,7 +158,7 @@
             <p14:sldId id="267"/>
           </p14:sldIdLst>
         </p14:section>
-        <p14:section name="Routes" id="{469fd77d-0631-174a-b16b-3dc187e54461}">
+        <p14:section name="Routes" id="{51e226ac-3187-fbd1-bc5e-bc6b93347211}">
           <p14:sldIdLst>
             <p14:sldId id="268"/>
             <p14:sldId id="269"/>
@@ -166,12 +166,12 @@
             <p14:sldId id="271"/>
           </p14:sldIdLst>
         </p14:section>
-        <p14:section name="Close" id="{6924a6cf-f6fa-a753-903d-c71ef4c0f868}">
+        <p14:section name="Close" id="{c0ea736c-864f-75f5-bf20-b25530611869}">
           <p14:sldIdLst>
             <p14:sldId id="272"/>
           </p14:sldIdLst>
         </p14:section>
-        <p14:section name="Answers" id="{d27ff5ff-7866-68ce-982e-268e7e71cf1f}">
+        <p14:section name="Answers" id="{4077302c-df24-69a3-baea-adbf110edffd}">
           <p14:sldIdLst>
             <p14:sldId id="273"/>
             <p14:sldId id="274"/>
